--- a/SmartPicks-Presentation.pptx
+++ b/SmartPicks-Presentation.pptx
@@ -5,23 +5,23 @@
     <p:sldMasterId id="2147483648" r:id="rId1"/>
   </p:sldMasterIdLst>
   <p:sldIdLst>
-    <p:sldId id="256" r:id="rId7"/>
-    <p:sldId id="257" r:id="rId8"/>
-    <p:sldId id="258" r:id="rId9"/>
-    <p:sldId id="259" r:id="rId10"/>
-    <p:sldId id="260" r:id="rId11"/>
-    <p:sldId id="261" r:id="rId12"/>
-    <p:sldId id="262" r:id="rId13"/>
-    <p:sldId id="263" r:id="rId14"/>
-    <p:sldId id="264" r:id="rId15"/>
-    <p:sldId id="265" r:id="rId16"/>
-    <p:sldId id="266" r:id="rId17"/>
-    <p:sldId id="267" r:id="rId18"/>
-    <p:sldId id="268" r:id="rId19"/>
-    <p:sldId id="269" r:id="rId20"/>
-    <p:sldId id="270" r:id="rId21"/>
+    <p:sldId id="256" r:id="rId2"/>
+    <p:sldId id="257" r:id="rId3"/>
+    <p:sldId id="258" r:id="rId4"/>
+    <p:sldId id="259" r:id="rId5"/>
+    <p:sldId id="260" r:id="rId6"/>
+    <p:sldId id="261" r:id="rId7"/>
+    <p:sldId id="262" r:id="rId8"/>
+    <p:sldId id="263" r:id="rId9"/>
+    <p:sldId id="264" r:id="rId10"/>
+    <p:sldId id="265" r:id="rId11"/>
+    <p:sldId id="266" r:id="rId12"/>
+    <p:sldId id="267" r:id="rId13"/>
+    <p:sldId id="268" r:id="rId14"/>
+    <p:sldId id="269" r:id="rId15"/>
+    <p:sldId id="270" r:id="rId16"/>
   </p:sldIdLst>
-  <p:sldSz cx="12191695" cy="6858000" type="screen4x3"/>
+  <p:sldSz cx="12192000" cy="6858000"/>
   <p:notesSz cx="6858000" cy="9144000"/>
   <p:defaultTextStyle>
     <a:defPPr>
@@ -118,6 +118,22 @@
       </a:defRPr>
     </a:lvl9pPr>
   </p:defaultTextStyle>
+  <p:extLst>
+    <p:ext uri="{EFAFB233-063F-42B5-8137-9DF3F51BA10A}">
+      <p15:sldGuideLst xmlns:p15="http://schemas.microsoft.com/office/powerpoint/2012/main">
+        <p15:guide id="1" orient="horz" pos="2160">
+          <p15:clr>
+            <a:srgbClr val="A4A3A4"/>
+          </p15:clr>
+        </p15:guide>
+        <p15:guide id="2" pos="2880">
+          <p15:clr>
+            <a:srgbClr val="A4A3A4"/>
+          </p15:clr>
+        </p15:guide>
+      </p15:sldGuideLst>
+    </p:ext>
+  </p:extLst>
 </p:presentation>
 </file>
 
@@ -159,10 +175,9 @@
           <a:lstStyle/>
           <a:p>
             <a:r>
-              <a:rPr lang="en-US" smtClean="0"/>
+              <a:rPr lang="en-US"/>
               <a:t>Click to edit Master title style</a:t>
             </a:r>
-            <a:endParaRPr lang="en-US"/>
           </a:p>
         </p:txBody>
       </p:sp>
@@ -278,10 +293,9 @@
           </a:lstStyle>
           <a:p>
             <a:r>
-              <a:rPr lang="en-US" smtClean="0"/>
+              <a:rPr lang="en-US"/>
               <a:t>Click to edit Master subtitle style</a:t>
             </a:r>
-            <a:endParaRPr lang="en-US"/>
           </a:p>
         </p:txBody>
       </p:sp>
@@ -302,7 +316,7 @@
           <a:p>
             <a:fld id="{5BCAD085-E8A6-8845-BD4E-CB4CCA059FC4}" type="datetimeFigureOut">
               <a:rPr lang="en-US" smtClean="0"/>
-              <a:t>1/27/13</a:t>
+              <a:t>7/14/2026</a:t>
             </a:fld>
             <a:endParaRPr lang="en-US"/>
           </a:p>
@@ -396,10 +410,9 @@
           <a:lstStyle/>
           <a:p>
             <a:r>
-              <a:rPr lang="en-US" smtClean="0"/>
+              <a:rPr lang="en-US"/>
               <a:t>Click to edit Master title style</a:t>
             </a:r>
-            <a:endParaRPr lang="en-US"/>
           </a:p>
         </p:txBody>
       </p:sp>
@@ -420,38 +433,37 @@
           <a:p>
             <a:pPr lvl="0"/>
             <a:r>
-              <a:rPr lang="en-US" smtClean="0"/>
+              <a:rPr lang="en-US"/>
               <a:t>Click to edit Master text styles</a:t>
             </a:r>
           </a:p>
           <a:p>
             <a:pPr lvl="1"/>
             <a:r>
-              <a:rPr lang="en-US" smtClean="0"/>
+              <a:rPr lang="en-US"/>
               <a:t>Second level</a:t>
             </a:r>
           </a:p>
           <a:p>
             <a:pPr lvl="2"/>
             <a:r>
-              <a:rPr lang="en-US" smtClean="0"/>
+              <a:rPr lang="en-US"/>
               <a:t>Third level</a:t>
             </a:r>
           </a:p>
           <a:p>
             <a:pPr lvl="3"/>
             <a:r>
-              <a:rPr lang="en-US" smtClean="0"/>
+              <a:rPr lang="en-US"/>
               <a:t>Fourth level</a:t>
             </a:r>
           </a:p>
           <a:p>
             <a:pPr lvl="4"/>
             <a:r>
-              <a:rPr lang="en-US" smtClean="0"/>
+              <a:rPr lang="en-US"/>
               <a:t>Fifth level</a:t>
             </a:r>
-            <a:endParaRPr lang="en-US"/>
           </a:p>
         </p:txBody>
       </p:sp>
@@ -472,7 +484,7 @@
           <a:p>
             <a:fld id="{5BCAD085-E8A6-8845-BD4E-CB4CCA059FC4}" type="datetimeFigureOut">
               <a:rPr lang="en-US" smtClean="0"/>
-              <a:t>1/27/13</a:t>
+              <a:t>7/14/2026</a:t>
             </a:fld>
             <a:endParaRPr lang="en-US"/>
           </a:p>
@@ -571,10 +583,9 @@
           <a:lstStyle/>
           <a:p>
             <a:r>
-              <a:rPr lang="en-US" smtClean="0"/>
+              <a:rPr lang="en-US"/>
               <a:t>Click to edit Master title style</a:t>
             </a:r>
-            <a:endParaRPr lang="en-US"/>
           </a:p>
         </p:txBody>
       </p:sp>
@@ -600,38 +611,37 @@
           <a:p>
             <a:pPr lvl="0"/>
             <a:r>
-              <a:rPr lang="en-US" smtClean="0"/>
+              <a:rPr lang="en-US"/>
               <a:t>Click to edit Master text styles</a:t>
             </a:r>
           </a:p>
           <a:p>
             <a:pPr lvl="1"/>
             <a:r>
-              <a:rPr lang="en-US" smtClean="0"/>
+              <a:rPr lang="en-US"/>
               <a:t>Second level</a:t>
             </a:r>
           </a:p>
           <a:p>
             <a:pPr lvl="2"/>
             <a:r>
-              <a:rPr lang="en-US" smtClean="0"/>
+              <a:rPr lang="en-US"/>
               <a:t>Third level</a:t>
             </a:r>
           </a:p>
           <a:p>
             <a:pPr lvl="3"/>
             <a:r>
-              <a:rPr lang="en-US" smtClean="0"/>
+              <a:rPr lang="en-US"/>
               <a:t>Fourth level</a:t>
             </a:r>
           </a:p>
           <a:p>
             <a:pPr lvl="4"/>
             <a:r>
-              <a:rPr lang="en-US" smtClean="0"/>
+              <a:rPr lang="en-US"/>
               <a:t>Fifth level</a:t>
             </a:r>
-            <a:endParaRPr lang="en-US"/>
           </a:p>
         </p:txBody>
       </p:sp>
@@ -652,7 +662,7 @@
           <a:p>
             <a:fld id="{5BCAD085-E8A6-8845-BD4E-CB4CCA059FC4}" type="datetimeFigureOut">
               <a:rPr lang="en-US" smtClean="0"/>
-              <a:t>1/27/13</a:t>
+              <a:t>7/14/2026</a:t>
             </a:fld>
             <a:endParaRPr lang="en-US"/>
           </a:p>
@@ -746,10 +756,9 @@
           <a:lstStyle/>
           <a:p>
             <a:r>
-              <a:rPr lang="en-US" smtClean="0"/>
+              <a:rPr lang="en-US"/>
               <a:t>Click to edit Master title style</a:t>
             </a:r>
-            <a:endParaRPr lang="en-US"/>
           </a:p>
         </p:txBody>
       </p:sp>
@@ -770,38 +779,37 @@
           <a:p>
             <a:pPr lvl="0"/>
             <a:r>
-              <a:rPr lang="en-US" smtClean="0"/>
+              <a:rPr lang="en-US"/>
               <a:t>Click to edit Master text styles</a:t>
             </a:r>
           </a:p>
           <a:p>
             <a:pPr lvl="1"/>
             <a:r>
-              <a:rPr lang="en-US" smtClean="0"/>
+              <a:rPr lang="en-US"/>
               <a:t>Second level</a:t>
             </a:r>
           </a:p>
           <a:p>
             <a:pPr lvl="2"/>
             <a:r>
-              <a:rPr lang="en-US" smtClean="0"/>
+              <a:rPr lang="en-US"/>
               <a:t>Third level</a:t>
             </a:r>
           </a:p>
           <a:p>
             <a:pPr lvl="3"/>
             <a:r>
-              <a:rPr lang="en-US" smtClean="0"/>
+              <a:rPr lang="en-US"/>
               <a:t>Fourth level</a:t>
             </a:r>
           </a:p>
           <a:p>
             <a:pPr lvl="4"/>
             <a:r>
-              <a:rPr lang="en-US" smtClean="0"/>
+              <a:rPr lang="en-US"/>
               <a:t>Fifth level</a:t>
             </a:r>
-            <a:endParaRPr lang="en-US"/>
           </a:p>
         </p:txBody>
       </p:sp>
@@ -822,7 +830,7 @@
           <a:p>
             <a:fld id="{5BCAD085-E8A6-8845-BD4E-CB4CCA059FC4}" type="datetimeFigureOut">
               <a:rPr lang="en-US" smtClean="0"/>
-              <a:t>1/27/13</a:t>
+              <a:t>7/14/2026</a:t>
             </a:fld>
             <a:endParaRPr lang="en-US"/>
           </a:p>
@@ -925,10 +933,9 @@
           </a:lstStyle>
           <a:p>
             <a:r>
-              <a:rPr lang="en-US" smtClean="0"/>
+              <a:rPr lang="en-US"/>
               <a:t>Click to edit Master title style</a:t>
             </a:r>
-            <a:endParaRPr lang="en-US"/>
           </a:p>
         </p:txBody>
       </p:sp>
@@ -1045,7 +1052,7 @@
           <a:p>
             <a:pPr lvl="0"/>
             <a:r>
-              <a:rPr lang="en-US" smtClean="0"/>
+              <a:rPr lang="en-US"/>
               <a:t>Click to edit Master text styles</a:t>
             </a:r>
           </a:p>
@@ -1068,7 +1075,7 @@
           <a:p>
             <a:fld id="{5BCAD085-E8A6-8845-BD4E-CB4CCA059FC4}" type="datetimeFigureOut">
               <a:rPr lang="en-US" smtClean="0"/>
-              <a:t>1/27/13</a:t>
+              <a:t>7/14/2026</a:t>
             </a:fld>
             <a:endParaRPr lang="en-US"/>
           </a:p>
@@ -1162,10 +1169,9 @@
           <a:lstStyle/>
           <a:p>
             <a:r>
-              <a:rPr lang="en-US" smtClean="0"/>
+              <a:rPr lang="en-US"/>
               <a:t>Click to edit Master title style</a:t>
             </a:r>
-            <a:endParaRPr lang="en-US"/>
           </a:p>
         </p:txBody>
       </p:sp>
@@ -1219,38 +1225,37 @@
           <a:p>
             <a:pPr lvl="0"/>
             <a:r>
-              <a:rPr lang="en-US" smtClean="0"/>
+              <a:rPr lang="en-US"/>
               <a:t>Click to edit Master text styles</a:t>
             </a:r>
           </a:p>
           <a:p>
             <a:pPr lvl="1"/>
             <a:r>
-              <a:rPr lang="en-US" smtClean="0"/>
+              <a:rPr lang="en-US"/>
               <a:t>Second level</a:t>
             </a:r>
           </a:p>
           <a:p>
             <a:pPr lvl="2"/>
             <a:r>
-              <a:rPr lang="en-US" smtClean="0"/>
+              <a:rPr lang="en-US"/>
               <a:t>Third level</a:t>
             </a:r>
           </a:p>
           <a:p>
             <a:pPr lvl="3"/>
             <a:r>
-              <a:rPr lang="en-US" smtClean="0"/>
+              <a:rPr lang="en-US"/>
               <a:t>Fourth level</a:t>
             </a:r>
           </a:p>
           <a:p>
             <a:pPr lvl="4"/>
             <a:r>
-              <a:rPr lang="en-US" smtClean="0"/>
+              <a:rPr lang="en-US"/>
               <a:t>Fifth level</a:t>
             </a:r>
-            <a:endParaRPr lang="en-US"/>
           </a:p>
         </p:txBody>
       </p:sp>
@@ -1304,38 +1309,37 @@
           <a:p>
             <a:pPr lvl="0"/>
             <a:r>
-              <a:rPr lang="en-US" smtClean="0"/>
+              <a:rPr lang="en-US"/>
               <a:t>Click to edit Master text styles</a:t>
             </a:r>
           </a:p>
           <a:p>
             <a:pPr lvl="1"/>
             <a:r>
-              <a:rPr lang="en-US" smtClean="0"/>
+              <a:rPr lang="en-US"/>
               <a:t>Second level</a:t>
             </a:r>
           </a:p>
           <a:p>
             <a:pPr lvl="2"/>
             <a:r>
-              <a:rPr lang="en-US" smtClean="0"/>
+              <a:rPr lang="en-US"/>
               <a:t>Third level</a:t>
             </a:r>
           </a:p>
           <a:p>
             <a:pPr lvl="3"/>
             <a:r>
-              <a:rPr lang="en-US" smtClean="0"/>
+              <a:rPr lang="en-US"/>
               <a:t>Fourth level</a:t>
             </a:r>
           </a:p>
           <a:p>
             <a:pPr lvl="4"/>
             <a:r>
-              <a:rPr lang="en-US" smtClean="0"/>
+              <a:rPr lang="en-US"/>
               <a:t>Fifth level</a:t>
             </a:r>
-            <a:endParaRPr lang="en-US"/>
           </a:p>
         </p:txBody>
       </p:sp>
@@ -1356,7 +1360,7 @@
           <a:p>
             <a:fld id="{5BCAD085-E8A6-8845-BD4E-CB4CCA059FC4}" type="datetimeFigureOut">
               <a:rPr lang="en-US" smtClean="0"/>
-              <a:t>1/27/13</a:t>
+              <a:t>7/14/2026</a:t>
             </a:fld>
             <a:endParaRPr lang="en-US"/>
           </a:p>
@@ -1454,10 +1458,9 @@
           </a:lstStyle>
           <a:p>
             <a:r>
-              <a:rPr lang="en-US" smtClean="0"/>
+              <a:rPr lang="en-US"/>
               <a:t>Click to edit Master title style</a:t>
             </a:r>
-            <a:endParaRPr lang="en-US"/>
           </a:p>
         </p:txBody>
       </p:sp>
@@ -1520,7 +1523,7 @@
           <a:p>
             <a:pPr lvl="0"/>
             <a:r>
-              <a:rPr lang="en-US" smtClean="0"/>
+              <a:rPr lang="en-US"/>
               <a:t>Click to edit Master text styles</a:t>
             </a:r>
           </a:p>
@@ -1576,38 +1579,37 @@
           <a:p>
             <a:pPr lvl="0"/>
             <a:r>
-              <a:rPr lang="en-US" smtClean="0"/>
+              <a:rPr lang="en-US"/>
               <a:t>Click to edit Master text styles</a:t>
             </a:r>
           </a:p>
           <a:p>
             <a:pPr lvl="1"/>
             <a:r>
-              <a:rPr lang="en-US" smtClean="0"/>
+              <a:rPr lang="en-US"/>
               <a:t>Second level</a:t>
             </a:r>
           </a:p>
           <a:p>
             <a:pPr lvl="2"/>
             <a:r>
-              <a:rPr lang="en-US" smtClean="0"/>
+              <a:rPr lang="en-US"/>
               <a:t>Third level</a:t>
             </a:r>
           </a:p>
           <a:p>
             <a:pPr lvl="3"/>
             <a:r>
-              <a:rPr lang="en-US" smtClean="0"/>
+              <a:rPr lang="en-US"/>
               <a:t>Fourth level</a:t>
             </a:r>
           </a:p>
           <a:p>
             <a:pPr lvl="4"/>
             <a:r>
-              <a:rPr lang="en-US" smtClean="0"/>
+              <a:rPr lang="en-US"/>
               <a:t>Fifth level</a:t>
             </a:r>
-            <a:endParaRPr lang="en-US"/>
           </a:p>
         </p:txBody>
       </p:sp>
@@ -1670,7 +1672,7 @@
           <a:p>
             <a:pPr lvl="0"/>
             <a:r>
-              <a:rPr lang="en-US" smtClean="0"/>
+              <a:rPr lang="en-US"/>
               <a:t>Click to edit Master text styles</a:t>
             </a:r>
           </a:p>
@@ -1726,38 +1728,37 @@
           <a:p>
             <a:pPr lvl="0"/>
             <a:r>
-              <a:rPr lang="en-US" smtClean="0"/>
+              <a:rPr lang="en-US"/>
               <a:t>Click to edit Master text styles</a:t>
             </a:r>
           </a:p>
           <a:p>
             <a:pPr lvl="1"/>
             <a:r>
-              <a:rPr lang="en-US" smtClean="0"/>
+              <a:rPr lang="en-US"/>
               <a:t>Second level</a:t>
             </a:r>
           </a:p>
           <a:p>
             <a:pPr lvl="2"/>
             <a:r>
-              <a:rPr lang="en-US" smtClean="0"/>
+              <a:rPr lang="en-US"/>
               <a:t>Third level</a:t>
             </a:r>
           </a:p>
           <a:p>
             <a:pPr lvl="3"/>
             <a:r>
-              <a:rPr lang="en-US" smtClean="0"/>
+              <a:rPr lang="en-US"/>
               <a:t>Fourth level</a:t>
             </a:r>
           </a:p>
           <a:p>
             <a:pPr lvl="4"/>
             <a:r>
-              <a:rPr lang="en-US" smtClean="0"/>
+              <a:rPr lang="en-US"/>
               <a:t>Fifth level</a:t>
             </a:r>
-            <a:endParaRPr lang="en-US"/>
           </a:p>
         </p:txBody>
       </p:sp>
@@ -1778,7 +1779,7 @@
           <a:p>
             <a:fld id="{5BCAD085-E8A6-8845-BD4E-CB4CCA059FC4}" type="datetimeFigureOut">
               <a:rPr lang="en-US" smtClean="0"/>
-              <a:t>1/27/13</a:t>
+              <a:t>7/14/2026</a:t>
             </a:fld>
             <a:endParaRPr lang="en-US"/>
           </a:p>
@@ -1872,10 +1873,9 @@
           <a:lstStyle/>
           <a:p>
             <a:r>
-              <a:rPr lang="en-US" smtClean="0"/>
+              <a:rPr lang="en-US"/>
               <a:t>Click to edit Master title style</a:t>
             </a:r>
-            <a:endParaRPr lang="en-US"/>
           </a:p>
         </p:txBody>
       </p:sp>
@@ -1896,7 +1896,7 @@
           <a:p>
             <a:fld id="{5BCAD085-E8A6-8845-BD4E-CB4CCA059FC4}" type="datetimeFigureOut">
               <a:rPr lang="en-US" smtClean="0"/>
-              <a:t>1/27/13</a:t>
+              <a:t>7/14/2026</a:t>
             </a:fld>
             <a:endParaRPr lang="en-US"/>
           </a:p>
@@ -1991,7 +1991,7 @@
           <a:p>
             <a:fld id="{5BCAD085-E8A6-8845-BD4E-CB4CCA059FC4}" type="datetimeFigureOut">
               <a:rPr lang="en-US" smtClean="0"/>
-              <a:t>1/27/13</a:t>
+              <a:t>7/14/2026</a:t>
             </a:fld>
             <a:endParaRPr lang="en-US"/>
           </a:p>
@@ -2094,10 +2094,9 @@
           </a:lstStyle>
           <a:p>
             <a:r>
-              <a:rPr lang="en-US" smtClean="0"/>
+              <a:rPr lang="en-US"/>
               <a:t>Click to edit Master title style</a:t>
             </a:r>
-            <a:endParaRPr lang="en-US"/>
           </a:p>
         </p:txBody>
       </p:sp>
@@ -2151,38 +2150,37 @@
           <a:p>
             <a:pPr lvl="0"/>
             <a:r>
-              <a:rPr lang="en-US" smtClean="0"/>
+              <a:rPr lang="en-US"/>
               <a:t>Click to edit Master text styles</a:t>
             </a:r>
           </a:p>
           <a:p>
             <a:pPr lvl="1"/>
             <a:r>
-              <a:rPr lang="en-US" smtClean="0"/>
+              <a:rPr lang="en-US"/>
               <a:t>Second level</a:t>
             </a:r>
           </a:p>
           <a:p>
             <a:pPr lvl="2"/>
             <a:r>
-              <a:rPr lang="en-US" smtClean="0"/>
+              <a:rPr lang="en-US"/>
               <a:t>Third level</a:t>
             </a:r>
           </a:p>
           <a:p>
             <a:pPr lvl="3"/>
             <a:r>
-              <a:rPr lang="en-US" smtClean="0"/>
+              <a:rPr lang="en-US"/>
               <a:t>Fourth level</a:t>
             </a:r>
           </a:p>
           <a:p>
             <a:pPr lvl="4"/>
             <a:r>
-              <a:rPr lang="en-US" smtClean="0"/>
+              <a:rPr lang="en-US"/>
               <a:t>Fifth level</a:t>
             </a:r>
-            <a:endParaRPr lang="en-US"/>
           </a:p>
         </p:txBody>
       </p:sp>
@@ -2245,7 +2243,7 @@
           <a:p>
             <a:pPr lvl="0"/>
             <a:r>
-              <a:rPr lang="en-US" smtClean="0"/>
+              <a:rPr lang="en-US"/>
               <a:t>Click to edit Master text styles</a:t>
             </a:r>
           </a:p>
@@ -2268,7 +2266,7 @@
           <a:p>
             <a:fld id="{5BCAD085-E8A6-8845-BD4E-CB4CCA059FC4}" type="datetimeFigureOut">
               <a:rPr lang="en-US" smtClean="0"/>
-              <a:t>1/27/13</a:t>
+              <a:t>7/14/2026</a:t>
             </a:fld>
             <a:endParaRPr lang="en-US"/>
           </a:p>
@@ -2371,10 +2369,9 @@
           </a:lstStyle>
           <a:p>
             <a:r>
-              <a:rPr lang="en-US" smtClean="0"/>
+              <a:rPr lang="en-US"/>
               <a:t>Click to edit Master title style</a:t>
             </a:r>
-            <a:endParaRPr lang="en-US"/>
           </a:p>
         </p:txBody>
       </p:sp>
@@ -2498,7 +2495,7 @@
           <a:p>
             <a:pPr lvl="0"/>
             <a:r>
-              <a:rPr lang="en-US" smtClean="0"/>
+              <a:rPr lang="en-US"/>
               <a:t>Click to edit Master text styles</a:t>
             </a:r>
           </a:p>
@@ -2521,7 +2518,7 @@
           <a:p>
             <a:fld id="{5BCAD085-E8A6-8845-BD4E-CB4CCA059FC4}" type="datetimeFigureOut">
               <a:rPr lang="en-US" smtClean="0"/>
-              <a:t>1/27/13</a:t>
+              <a:t>7/14/2026</a:t>
             </a:fld>
             <a:endParaRPr lang="en-US"/>
           </a:p>
@@ -2630,10 +2627,9 @@
           <a:lstStyle/>
           <a:p>
             <a:r>
-              <a:rPr lang="en-US" smtClean="0"/>
+              <a:rPr lang="en-US"/>
               <a:t>Click to edit Master title style</a:t>
             </a:r>
-            <a:endParaRPr lang="en-US"/>
           </a:p>
         </p:txBody>
       </p:sp>
@@ -2664,38 +2660,37 @@
           <a:p>
             <a:pPr lvl="0"/>
             <a:r>
-              <a:rPr lang="en-US" smtClean="0"/>
+              <a:rPr lang="en-US"/>
               <a:t>Click to edit Master text styles</a:t>
             </a:r>
           </a:p>
           <a:p>
             <a:pPr lvl="1"/>
             <a:r>
-              <a:rPr lang="en-US" smtClean="0"/>
+              <a:rPr lang="en-US"/>
               <a:t>Second level</a:t>
             </a:r>
           </a:p>
           <a:p>
             <a:pPr lvl="2"/>
             <a:r>
-              <a:rPr lang="en-US" smtClean="0"/>
+              <a:rPr lang="en-US"/>
               <a:t>Third level</a:t>
             </a:r>
           </a:p>
           <a:p>
             <a:pPr lvl="3"/>
             <a:r>
-              <a:rPr lang="en-US" smtClean="0"/>
+              <a:rPr lang="en-US"/>
               <a:t>Fourth level</a:t>
             </a:r>
           </a:p>
           <a:p>
             <a:pPr lvl="4"/>
             <a:r>
-              <a:rPr lang="en-US" smtClean="0"/>
+              <a:rPr lang="en-US"/>
               <a:t>Fifth level</a:t>
             </a:r>
-            <a:endParaRPr lang="en-US"/>
           </a:p>
         </p:txBody>
       </p:sp>
@@ -2734,7 +2729,7 @@
           <a:p>
             <a:fld id="{5BCAD085-E8A6-8845-BD4E-CB4CCA059FC4}" type="datetimeFigureOut">
               <a:rPr lang="en-US" smtClean="0"/>
-              <a:t>1/27/13</a:t>
+              <a:t>7/14/2026</a:t>
             </a:fld>
             <a:endParaRPr lang="en-US"/>
           </a:p>
@@ -3093,7 +3088,7 @@
 </file>
 
 <file path=ppt/slides/slide1.xml><?xml version="1.0" encoding="utf-8"?>
-<p:sld xmlns:a="http://schemas.openxmlformats.org/drawingml/2006/main" xmlns:p="http://schemas.openxmlformats.org/presentationml/2006/main" xmlns:r="http://schemas.openxmlformats.org/officeDocument/2006/relationships">
+<p:sld xmlns:a="http://schemas.openxmlformats.org/drawingml/2006/main" xmlns:r="http://schemas.openxmlformats.org/officeDocument/2006/relationships" xmlns:p="http://schemas.openxmlformats.org/presentationml/2006/main">
   <p:cSld>
     <p:spTree>
       <p:nvGrpSpPr>
@@ -3101,7 +3096,14 @@
         <p:cNvGrpSpPr/>
         <p:nvPr/>
       </p:nvGrpSpPr>
-      <p:grpSpPr/>
+      <p:grpSpPr>
+        <a:xfrm>
+          <a:off x="0" y="0"/>
+          <a:ext cx="0" cy="0"/>
+          <a:chOff x="0" y="0"/>
+          <a:chExt cx="0" cy="0"/>
+        </a:xfrm>
+      </p:grpSpPr>
       <p:sp>
         <p:nvSpPr>
           <p:cNvPr id="2" name="Rectangle 1"/>
@@ -3110,7 +3112,7 @@
         </p:nvSpPr>
         <p:spPr>
           <a:xfrm>
-            <a:off x="0" y="0"/>
+            <a:off x="0" y="27432"/>
             <a:ext cx="12191695" cy="6858000"/>
           </a:xfrm>
           <a:prstGeom prst="rect">
@@ -3143,6 +3145,7 @@
           <a:lstStyle/>
           <a:p>
             <a:pPr algn="ctr"/>
+            <a:endParaRPr/>
           </a:p>
         </p:txBody>
       </p:sp>
@@ -3223,6 +3226,7 @@
           <a:lstStyle/>
           <a:p>
             <a:pPr algn="ctr"/>
+            <a:endParaRPr/>
           </a:p>
         </p:txBody>
       </p:sp>
@@ -3235,7 +3239,7 @@
         <p:spPr>
           <a:xfrm>
             <a:off x="731520" y="3474720"/>
-            <a:ext cx="10698480" cy="1005840"/>
+            <a:ext cx="10698480" cy="707886"/>
           </a:xfrm>
           <a:prstGeom prst="rect">
             <a:avLst/>
@@ -3257,11 +3261,17 @@
               </a:defRPr>
             </a:pPr>
             <a:r>
+              <a:rPr dirty="0"/>
               <a:t>A Serverless, Event-Driven Product Recommendation System on AWS</a:t>
             </a:r>
           </a:p>
           <a:p>
             <a:r>
+              <a:rPr dirty="0">
+                <a:solidFill>
+                  <a:schemeClr val="bg1"/>
+                </a:solidFill>
+              </a:rPr>
               <a:t>Built with Lambda, DynamoDB, API Gateway, and Terraform</a:t>
             </a:r>
           </a:p>
@@ -3276,7 +3286,7 @@
         <p:spPr>
           <a:xfrm>
             <a:off x="731520" y="6035040"/>
-            <a:ext cx="10698480" cy="548640"/>
+            <a:ext cx="2019977" cy="307777"/>
           </a:xfrm>
           <a:prstGeom prst="rect">
             <a:avLst/>
@@ -3298,7 +3308,20 @@
               </a:defRPr>
             </a:pPr>
             <a:r>
-              <a:t>AWS Academy Learner Lab Project   |   [Your Name]   |   July 2026</a:t>
+              <a:rPr lang="en-CA" dirty="0"/>
+              <a:t>Made By:</a:t>
+            </a:r>
+            <a:r>
+              <a:rPr dirty="0"/>
+              <a:t>   </a:t>
+            </a:r>
+            <a:r>
+              <a:rPr lang="en-CA" dirty="0"/>
+              <a:t>Mahek Shah</a:t>
+            </a:r>
+            <a:r>
+              <a:rPr dirty="0"/>
+              <a:t>   </a:t>
             </a:r>
           </a:p>
         </p:txBody>
@@ -3312,7 +3335,7 @@
 </file>
 
 <file path=ppt/slides/slide10.xml><?xml version="1.0" encoding="utf-8"?>
-<p:sld xmlns:a="http://schemas.openxmlformats.org/drawingml/2006/main" xmlns:p="http://schemas.openxmlformats.org/presentationml/2006/main" xmlns:r="http://schemas.openxmlformats.org/officeDocument/2006/relationships">
+<p:sld xmlns:a="http://schemas.openxmlformats.org/drawingml/2006/main" xmlns:r="http://schemas.openxmlformats.org/officeDocument/2006/relationships" xmlns:p="http://schemas.openxmlformats.org/presentationml/2006/main">
   <p:cSld>
     <p:spTree>
       <p:nvGrpSpPr>
@@ -3320,7 +3343,14 @@
         <p:cNvGrpSpPr/>
         <p:nvPr/>
       </p:nvGrpSpPr>
-      <p:grpSpPr/>
+      <p:grpSpPr>
+        <a:xfrm>
+          <a:off x="0" y="0"/>
+          <a:ext cx="0" cy="0"/>
+          <a:chOff x="0" y="0"/>
+          <a:chExt cx="0" cy="0"/>
+        </a:xfrm>
+      </p:grpSpPr>
       <p:sp>
         <p:nvSpPr>
           <p:cNvPr id="2" name="Rectangle 1"/>
@@ -3362,6 +3392,7 @@
           <a:lstStyle/>
           <a:p>
             <a:pPr algn="ctr"/>
+            <a:endParaRPr/>
           </a:p>
         </p:txBody>
       </p:sp>
@@ -3442,6 +3473,7 @@
           <a:lstStyle/>
           <a:p>
             <a:pPr algn="ctr"/>
+            <a:endParaRPr/>
           </a:p>
         </p:txBody>
       </p:sp>
@@ -3464,8 +3496,20 @@
                 <a:tableStyleId>{5C22544A-7EE6-4342-B048-85BDC9FD1C3A}</a:tableStyleId>
               </a:tblPr>
               <a:tblGrid>
-                <a:gridCol w="3474720"/>
-                <a:gridCol w="7406640"/>
+                <a:gridCol w="3474720">
+                  <a:extLst>
+                    <a:ext uri="{9D8B030D-6E8A-4147-A177-3AD203B41FA5}">
+                      <a16:colId xmlns:a16="http://schemas.microsoft.com/office/drawing/2014/main" val="20000"/>
+                    </a:ext>
+                  </a:extLst>
+                </a:gridCol>
+                <a:gridCol w="7406640">
+                  <a:extLst>
+                    <a:ext uri="{9D8B030D-6E8A-4147-A177-3AD203B41FA5}">
+                      <a16:colId xmlns:a16="http://schemas.microsoft.com/office/drawing/2014/main" val="20001"/>
+                    </a:ext>
+                  </a:extLst>
+                </a:gridCol>
               </a:tblGrid>
               <a:tr h="620485">
                 <a:tc>
@@ -3474,7 +3518,7 @@
                     <a:lstStyle/>
                     <a:p>
                       <a:pPr>
-                        <a:defRPr b="1" sz="1400">
+                        <a:defRPr sz="1400" b="1">
                           <a:solidFill>
                             <a:srgbClr val="FFFFFF"/>
                           </a:solidFill>
@@ -3498,7 +3542,7 @@
                     <a:lstStyle/>
                     <a:p>
                       <a:pPr>
-                        <a:defRPr b="1" sz="1400">
+                        <a:defRPr sz="1400" b="1">
                           <a:solidFill>
                             <a:srgbClr val="FFFFFF"/>
                           </a:solidFill>
@@ -3516,11 +3560,16 @@
                     </a:solidFill>
                   </a:tcPr>
                 </a:tc>
+                <a:extLst>
+                  <a:ext uri="{0D108BD9-81ED-4DB2-BD59-A6C34878D82A}">
+                    <a16:rowId xmlns:a16="http://schemas.microsoft.com/office/drawing/2014/main" val="10000"/>
+                  </a:ext>
+                </a:extLst>
               </a:tr>
               <a:tr h="620485">
                 <a:tc>
                   <a:txBody>
-                    <a:bodyPr wrap="square"/>
+                    <a:bodyPr/>
                     <a:lstStyle/>
                     <a:p>
                       <a:pPr>
@@ -3544,7 +3593,7 @@
                 </a:tc>
                 <a:tc>
                   <a:txBody>
-                    <a:bodyPr wrap="square"/>
+                    <a:bodyPr/>
                     <a:lstStyle/>
                     <a:p>
                       <a:pPr>
@@ -3566,11 +3615,16 @@
                     </a:solidFill>
                   </a:tcPr>
                 </a:tc>
+                <a:extLst>
+                  <a:ext uri="{0D108BD9-81ED-4DB2-BD59-A6C34878D82A}">
+                    <a16:rowId xmlns:a16="http://schemas.microsoft.com/office/drawing/2014/main" val="10001"/>
+                  </a:ext>
+                </a:extLst>
               </a:tr>
               <a:tr h="620485">
                 <a:tc>
                   <a:txBody>
-                    <a:bodyPr wrap="square"/>
+                    <a:bodyPr/>
                     <a:lstStyle/>
                     <a:p>
                       <a:pPr>
@@ -3594,7 +3648,7 @@
                 </a:tc>
                 <a:tc>
                   <a:txBody>
-                    <a:bodyPr wrap="square"/>
+                    <a:bodyPr/>
                     <a:lstStyle/>
                     <a:p>
                       <a:pPr>
@@ -3616,11 +3670,16 @@
                     </a:solidFill>
                   </a:tcPr>
                 </a:tc>
+                <a:extLst>
+                  <a:ext uri="{0D108BD9-81ED-4DB2-BD59-A6C34878D82A}">
+                    <a16:rowId xmlns:a16="http://schemas.microsoft.com/office/drawing/2014/main" val="10002"/>
+                  </a:ext>
+                </a:extLst>
               </a:tr>
               <a:tr h="620485">
                 <a:tc>
                   <a:txBody>
-                    <a:bodyPr wrap="square"/>
+                    <a:bodyPr/>
                     <a:lstStyle/>
                     <a:p>
                       <a:pPr>
@@ -3644,7 +3703,7 @@
                 </a:tc>
                 <a:tc>
                   <a:txBody>
-                    <a:bodyPr wrap="square"/>
+                    <a:bodyPr/>
                     <a:lstStyle/>
                     <a:p>
                       <a:pPr>
@@ -3666,11 +3725,16 @@
                     </a:solidFill>
                   </a:tcPr>
                 </a:tc>
+                <a:extLst>
+                  <a:ext uri="{0D108BD9-81ED-4DB2-BD59-A6C34878D82A}">
+                    <a16:rowId xmlns:a16="http://schemas.microsoft.com/office/drawing/2014/main" val="10003"/>
+                  </a:ext>
+                </a:extLst>
               </a:tr>
               <a:tr h="620485">
                 <a:tc>
                   <a:txBody>
-                    <a:bodyPr wrap="square"/>
+                    <a:bodyPr/>
                     <a:lstStyle/>
                     <a:p>
                       <a:pPr>
@@ -3694,7 +3758,7 @@
                 </a:tc>
                 <a:tc>
                   <a:txBody>
-                    <a:bodyPr wrap="square"/>
+                    <a:bodyPr/>
                     <a:lstStyle/>
                     <a:p>
                       <a:pPr>
@@ -3716,11 +3780,16 @@
                     </a:solidFill>
                   </a:tcPr>
                 </a:tc>
+                <a:extLst>
+                  <a:ext uri="{0D108BD9-81ED-4DB2-BD59-A6C34878D82A}">
+                    <a16:rowId xmlns:a16="http://schemas.microsoft.com/office/drawing/2014/main" val="10004"/>
+                  </a:ext>
+                </a:extLst>
               </a:tr>
               <a:tr h="620485">
                 <a:tc>
                   <a:txBody>
-                    <a:bodyPr wrap="square"/>
+                    <a:bodyPr/>
                     <a:lstStyle/>
                     <a:p>
                       <a:pPr>
@@ -3744,7 +3813,7 @@
                 </a:tc>
                 <a:tc>
                   <a:txBody>
-                    <a:bodyPr wrap="square"/>
+                    <a:bodyPr/>
                     <a:lstStyle/>
                     <a:p>
                       <a:pPr>
@@ -3766,11 +3835,16 @@
                     </a:solidFill>
                   </a:tcPr>
                 </a:tc>
+                <a:extLst>
+                  <a:ext uri="{0D108BD9-81ED-4DB2-BD59-A6C34878D82A}">
+                    <a16:rowId xmlns:a16="http://schemas.microsoft.com/office/drawing/2014/main" val="10005"/>
+                  </a:ext>
+                </a:extLst>
               </a:tr>
               <a:tr h="620490">
                 <a:tc>
                   <a:txBody>
-                    <a:bodyPr wrap="square"/>
+                    <a:bodyPr/>
                     <a:lstStyle/>
                     <a:p>
                       <a:pPr>
@@ -3794,7 +3868,7 @@
                 </a:tc>
                 <a:tc>
                   <a:txBody>
-                    <a:bodyPr wrap="square"/>
+                    <a:bodyPr/>
                     <a:lstStyle/>
                     <a:p>
                       <a:pPr>
@@ -3816,6 +3890,11 @@
                     </a:solidFill>
                   </a:tcPr>
                 </a:tc>
+                <a:extLst>
+                  <a:ext uri="{0D108BD9-81ED-4DB2-BD59-A6C34878D82A}">
+                    <a16:rowId xmlns:a16="http://schemas.microsoft.com/office/drawing/2014/main" val="10006"/>
+                  </a:ext>
+                </a:extLst>
               </a:tr>
             </a:tbl>
           </a:graphicData>
@@ -3830,7 +3909,7 @@
 </file>
 
 <file path=ppt/slides/slide11.xml><?xml version="1.0" encoding="utf-8"?>
-<p:sld xmlns:a="http://schemas.openxmlformats.org/drawingml/2006/main" xmlns:p="http://schemas.openxmlformats.org/presentationml/2006/main" xmlns:r="http://schemas.openxmlformats.org/officeDocument/2006/relationships">
+<p:sld xmlns:a="http://schemas.openxmlformats.org/drawingml/2006/main" xmlns:r="http://schemas.openxmlformats.org/officeDocument/2006/relationships" xmlns:p="http://schemas.openxmlformats.org/presentationml/2006/main">
   <p:cSld>
     <p:spTree>
       <p:nvGrpSpPr>
@@ -3838,7 +3917,14 @@
         <p:cNvGrpSpPr/>
         <p:nvPr/>
       </p:nvGrpSpPr>
-      <p:grpSpPr/>
+      <p:grpSpPr>
+        <a:xfrm>
+          <a:off x="0" y="0"/>
+          <a:ext cx="0" cy="0"/>
+          <a:chOff x="0" y="0"/>
+          <a:chExt cx="0" cy="0"/>
+        </a:xfrm>
+      </p:grpSpPr>
       <p:sp>
         <p:nvSpPr>
           <p:cNvPr id="2" name="Rectangle 1"/>
@@ -3880,6 +3966,7 @@
           <a:lstStyle/>
           <a:p>
             <a:pPr algn="ctr"/>
+            <a:endParaRPr/>
           </a:p>
         </p:txBody>
       </p:sp>
@@ -3960,6 +4047,7 @@
           <a:lstStyle/>
           <a:p>
             <a:pPr algn="ctr"/>
+            <a:endParaRPr/>
           </a:p>
         </p:txBody>
       </p:sp>
@@ -4123,7 +4211,7 @@
 </file>
 
 <file path=ppt/slides/slide12.xml><?xml version="1.0" encoding="utf-8"?>
-<p:sld xmlns:a="http://schemas.openxmlformats.org/drawingml/2006/main" xmlns:p="http://schemas.openxmlformats.org/presentationml/2006/main" xmlns:r="http://schemas.openxmlformats.org/officeDocument/2006/relationships">
+<p:sld xmlns:a="http://schemas.openxmlformats.org/drawingml/2006/main" xmlns:r="http://schemas.openxmlformats.org/officeDocument/2006/relationships" xmlns:p="http://schemas.openxmlformats.org/presentationml/2006/main">
   <p:cSld>
     <p:spTree>
       <p:nvGrpSpPr>
@@ -4131,7 +4219,14 @@
         <p:cNvGrpSpPr/>
         <p:nvPr/>
       </p:nvGrpSpPr>
-      <p:grpSpPr/>
+      <p:grpSpPr>
+        <a:xfrm>
+          <a:off x="0" y="0"/>
+          <a:ext cx="0" cy="0"/>
+          <a:chOff x="0" y="0"/>
+          <a:chExt cx="0" cy="0"/>
+        </a:xfrm>
+      </p:grpSpPr>
       <p:sp>
         <p:nvSpPr>
           <p:cNvPr id="2" name="Rectangle 1"/>
@@ -4173,6 +4268,7 @@
           <a:lstStyle/>
           <a:p>
             <a:pPr algn="ctr"/>
+            <a:endParaRPr/>
           </a:p>
         </p:txBody>
       </p:sp>
@@ -4253,6 +4349,7 @@
           <a:lstStyle/>
           <a:p>
             <a:pPr algn="ctr"/>
+            <a:endParaRPr/>
           </a:p>
         </p:txBody>
       </p:sp>
@@ -4400,7 +4497,7 @@
 </file>
 
 <file path=ppt/slides/slide13.xml><?xml version="1.0" encoding="utf-8"?>
-<p:sld xmlns:a="http://schemas.openxmlformats.org/drawingml/2006/main" xmlns:p="http://schemas.openxmlformats.org/presentationml/2006/main" xmlns:r="http://schemas.openxmlformats.org/officeDocument/2006/relationships">
+<p:sld xmlns:a="http://schemas.openxmlformats.org/drawingml/2006/main" xmlns:r="http://schemas.openxmlformats.org/officeDocument/2006/relationships" xmlns:p="http://schemas.openxmlformats.org/presentationml/2006/main">
   <p:cSld>
     <p:spTree>
       <p:nvGrpSpPr>
@@ -4408,7 +4505,14 @@
         <p:cNvGrpSpPr/>
         <p:nvPr/>
       </p:nvGrpSpPr>
-      <p:grpSpPr/>
+      <p:grpSpPr>
+        <a:xfrm>
+          <a:off x="0" y="0"/>
+          <a:ext cx="0" cy="0"/>
+          <a:chOff x="0" y="0"/>
+          <a:chExt cx="0" cy="0"/>
+        </a:xfrm>
+      </p:grpSpPr>
       <p:sp>
         <p:nvSpPr>
           <p:cNvPr id="2" name="Rectangle 1"/>
@@ -4450,6 +4554,7 @@
           <a:lstStyle/>
           <a:p>
             <a:pPr algn="ctr"/>
+            <a:endParaRPr/>
           </a:p>
         </p:txBody>
       </p:sp>
@@ -4530,6 +4635,7 @@
           <a:lstStyle/>
           <a:p>
             <a:pPr algn="ctr"/>
+            <a:endParaRPr/>
           </a:p>
         </p:txBody>
       </p:sp>
@@ -4725,7 +4831,7 @@
 </file>
 
 <file path=ppt/slides/slide14.xml><?xml version="1.0" encoding="utf-8"?>
-<p:sld xmlns:a="http://schemas.openxmlformats.org/drawingml/2006/main" xmlns:p="http://schemas.openxmlformats.org/presentationml/2006/main" xmlns:r="http://schemas.openxmlformats.org/officeDocument/2006/relationships">
+<p:sld xmlns:a="http://schemas.openxmlformats.org/drawingml/2006/main" xmlns:r="http://schemas.openxmlformats.org/officeDocument/2006/relationships" xmlns:p="http://schemas.openxmlformats.org/presentationml/2006/main">
   <p:cSld>
     <p:spTree>
       <p:nvGrpSpPr>
@@ -4733,7 +4839,14 @@
         <p:cNvGrpSpPr/>
         <p:nvPr/>
       </p:nvGrpSpPr>
-      <p:grpSpPr/>
+      <p:grpSpPr>
+        <a:xfrm>
+          <a:off x="0" y="0"/>
+          <a:ext cx="0" cy="0"/>
+          <a:chOff x="0" y="0"/>
+          <a:chExt cx="0" cy="0"/>
+        </a:xfrm>
+      </p:grpSpPr>
       <p:sp>
         <p:nvSpPr>
           <p:cNvPr id="2" name="Rectangle 1"/>
@@ -4775,6 +4888,7 @@
           <a:lstStyle/>
           <a:p>
             <a:pPr algn="ctr"/>
+            <a:endParaRPr/>
           </a:p>
         </p:txBody>
       </p:sp>
@@ -4855,6 +4969,7 @@
           <a:lstStyle/>
           <a:p>
             <a:pPr algn="ctr"/>
+            <a:endParaRPr/>
           </a:p>
         </p:txBody>
       </p:sp>
@@ -5002,7 +5117,7 @@
 </file>
 
 <file path=ppt/slides/slide15.xml><?xml version="1.0" encoding="utf-8"?>
-<p:sld xmlns:a="http://schemas.openxmlformats.org/drawingml/2006/main" xmlns:p="http://schemas.openxmlformats.org/presentationml/2006/main" xmlns:r="http://schemas.openxmlformats.org/officeDocument/2006/relationships">
+<p:sld xmlns:a="http://schemas.openxmlformats.org/drawingml/2006/main" xmlns:r="http://schemas.openxmlformats.org/officeDocument/2006/relationships" xmlns:p="http://schemas.openxmlformats.org/presentationml/2006/main">
   <p:cSld>
     <p:spTree>
       <p:nvGrpSpPr>
@@ -5010,7 +5125,14 @@
         <p:cNvGrpSpPr/>
         <p:nvPr/>
       </p:nvGrpSpPr>
-      <p:grpSpPr/>
+      <p:grpSpPr>
+        <a:xfrm>
+          <a:off x="0" y="0"/>
+          <a:ext cx="0" cy="0"/>
+          <a:chOff x="0" y="0"/>
+          <a:chExt cx="0" cy="0"/>
+        </a:xfrm>
+      </p:grpSpPr>
       <p:sp>
         <p:nvSpPr>
           <p:cNvPr id="2" name="Rectangle 1"/>
@@ -5052,6 +5174,7 @@
           <a:lstStyle/>
           <a:p>
             <a:pPr algn="ctr"/>
+            <a:endParaRPr/>
           </a:p>
         </p:txBody>
       </p:sp>
@@ -5132,6 +5255,7 @@
           <a:lstStyle/>
           <a:p>
             <a:pPr algn="ctr"/>
+            <a:endParaRPr/>
           </a:p>
         </p:txBody>
       </p:sp>
@@ -5180,7 +5304,7 @@
 </file>
 
 <file path=ppt/slides/slide2.xml><?xml version="1.0" encoding="utf-8"?>
-<p:sld xmlns:a="http://schemas.openxmlformats.org/drawingml/2006/main" xmlns:p="http://schemas.openxmlformats.org/presentationml/2006/main" xmlns:r="http://schemas.openxmlformats.org/officeDocument/2006/relationships">
+<p:sld xmlns:a="http://schemas.openxmlformats.org/drawingml/2006/main" xmlns:r="http://schemas.openxmlformats.org/officeDocument/2006/relationships" xmlns:p="http://schemas.openxmlformats.org/presentationml/2006/main">
   <p:cSld>
     <p:spTree>
       <p:nvGrpSpPr>
@@ -5188,7 +5312,14 @@
         <p:cNvGrpSpPr/>
         <p:nvPr/>
       </p:nvGrpSpPr>
-      <p:grpSpPr/>
+      <p:grpSpPr>
+        <a:xfrm>
+          <a:off x="0" y="0"/>
+          <a:ext cx="0" cy="0"/>
+          <a:chOff x="0" y="0"/>
+          <a:chExt cx="0" cy="0"/>
+        </a:xfrm>
+      </p:grpSpPr>
       <p:sp>
         <p:nvSpPr>
           <p:cNvPr id="2" name="Rectangle 1"/>
@@ -5230,6 +5361,7 @@
           <a:lstStyle/>
           <a:p>
             <a:pPr algn="ctr"/>
+            <a:endParaRPr/>
           </a:p>
         </p:txBody>
       </p:sp>
@@ -5310,6 +5442,7 @@
           <a:lstStyle/>
           <a:p>
             <a:pPr algn="ctr"/>
+            <a:endParaRPr/>
           </a:p>
         </p:txBody>
       </p:sp>
@@ -5473,7 +5606,7 @@
 </file>
 
 <file path=ppt/slides/slide3.xml><?xml version="1.0" encoding="utf-8"?>
-<p:sld xmlns:a="http://schemas.openxmlformats.org/drawingml/2006/main" xmlns:p="http://schemas.openxmlformats.org/presentationml/2006/main" xmlns:r="http://schemas.openxmlformats.org/officeDocument/2006/relationships">
+<p:sld xmlns:a="http://schemas.openxmlformats.org/drawingml/2006/main" xmlns:r="http://schemas.openxmlformats.org/officeDocument/2006/relationships" xmlns:p="http://schemas.openxmlformats.org/presentationml/2006/main">
   <p:cSld>
     <p:spTree>
       <p:nvGrpSpPr>
@@ -5481,7 +5614,14 @@
         <p:cNvGrpSpPr/>
         <p:nvPr/>
       </p:nvGrpSpPr>
-      <p:grpSpPr/>
+      <p:grpSpPr>
+        <a:xfrm>
+          <a:off x="0" y="0"/>
+          <a:ext cx="0" cy="0"/>
+          <a:chOff x="0" y="0"/>
+          <a:chExt cx="0" cy="0"/>
+        </a:xfrm>
+      </p:grpSpPr>
       <p:sp>
         <p:nvSpPr>
           <p:cNvPr id="2" name="Rectangle 1"/>
@@ -5523,6 +5663,7 @@
           <a:lstStyle/>
           <a:p>
             <a:pPr algn="ctr"/>
+            <a:endParaRPr/>
           </a:p>
         </p:txBody>
       </p:sp>
@@ -5603,6 +5744,7 @@
           <a:lstStyle/>
           <a:p>
             <a:pPr algn="ctr"/>
+            <a:endParaRPr/>
           </a:p>
         </p:txBody>
       </p:sp>
@@ -5681,7 +5823,7 @@
           </a:fontRef>
         </p:style>
         <p:txBody>
-          <a:bodyPr rtlCol="0" anchor="ctr" wrap="square" lIns="50800" rIns="50800" tIns="25400" bIns="25400"/>
+          <a:bodyPr wrap="square" lIns="50800" tIns="25400" rIns="50800" bIns="25400" rtlCol="0" anchor="ctr"/>
           <a:lstStyle/>
           <a:p>
             <a:pPr algn="ctr">
@@ -5737,7 +5879,7 @@
           </a:fontRef>
         </p:style>
         <p:txBody>
-          <a:bodyPr rtlCol="0" anchor="ctr" wrap="square" lIns="50800" rIns="50800" tIns="25400" bIns="25400"/>
+          <a:bodyPr wrap="square" lIns="50800" tIns="25400" rIns="50800" bIns="25400" rtlCol="0" anchor="ctr"/>
           <a:lstStyle/>
           <a:p>
             <a:pPr algn="ctr">
@@ -5806,7 +5948,7 @@
           </a:fontRef>
         </p:style>
         <p:txBody>
-          <a:bodyPr rtlCol="0" anchor="ctr" wrap="square" lIns="50800" rIns="50800" tIns="25400" bIns="25400"/>
+          <a:bodyPr wrap="square" lIns="50800" tIns="25400" rIns="50800" bIns="25400" rtlCol="0" anchor="ctr"/>
           <a:lstStyle/>
           <a:p>
             <a:pPr algn="ctr">
@@ -5875,7 +6017,7 @@
           </a:fontRef>
         </p:style>
         <p:txBody>
-          <a:bodyPr rtlCol="0" anchor="ctr" wrap="square" lIns="50800" rIns="50800" tIns="25400" bIns="25400"/>
+          <a:bodyPr wrap="square" lIns="50800" tIns="25400" rIns="50800" bIns="25400" rtlCol="0" anchor="ctr"/>
           <a:lstStyle/>
           <a:p>
             <a:pPr algn="ctr">
@@ -5944,7 +6086,7 @@
           </a:fontRef>
         </p:style>
         <p:txBody>
-          <a:bodyPr rtlCol="0" anchor="ctr" wrap="square" lIns="50800" rIns="50800" tIns="25400" bIns="25400"/>
+          <a:bodyPr wrap="square" lIns="50800" tIns="25400" rIns="50800" bIns="25400" rtlCol="0" anchor="ctr"/>
           <a:lstStyle/>
           <a:p>
             <a:pPr algn="ctr">
@@ -6013,7 +6155,7 @@
           </a:fontRef>
         </p:style>
         <p:txBody>
-          <a:bodyPr rtlCol="0" anchor="ctr" wrap="square" lIns="50800" rIns="50800" tIns="25400" bIns="25400"/>
+          <a:bodyPr wrap="square" lIns="50800" tIns="25400" rIns="50800" bIns="25400" rtlCol="0" anchor="ctr"/>
           <a:lstStyle/>
           <a:p>
             <a:pPr algn="ctr">
@@ -6082,7 +6224,7 @@
           </a:fontRef>
         </p:style>
         <p:txBody>
-          <a:bodyPr rtlCol="0" anchor="ctr" wrap="square" lIns="50800" rIns="50800" tIns="25400" bIns="25400"/>
+          <a:bodyPr wrap="square" lIns="50800" tIns="25400" rIns="50800" bIns="25400" rtlCol="0" anchor="ctr"/>
           <a:lstStyle/>
           <a:p>
             <a:pPr algn="ctr">
@@ -6369,6 +6511,7 @@
           <a:lstStyle/>
           <a:p>
             <a:pPr algn="ctr"/>
+            <a:endParaRPr/>
           </a:p>
         </p:txBody>
       </p:sp>
@@ -6447,7 +6590,7 @@
           </a:fontRef>
         </p:style>
         <p:txBody>
-          <a:bodyPr rtlCol="0" anchor="ctr" wrap="square" lIns="50800" rIns="50800" tIns="25400" bIns="25400"/>
+          <a:bodyPr wrap="square" lIns="50800" tIns="25400" rIns="50800" bIns="25400" rtlCol="0" anchor="ctr"/>
           <a:lstStyle/>
           <a:p>
             <a:pPr algn="ctr">
@@ -6516,7 +6659,7 @@
           </a:fontRef>
         </p:style>
         <p:txBody>
-          <a:bodyPr rtlCol="0" anchor="ctr" wrap="square" lIns="50800" rIns="50800" tIns="25400" bIns="25400"/>
+          <a:bodyPr wrap="square" lIns="50800" tIns="25400" rIns="50800" bIns="25400" rtlCol="0" anchor="ctr"/>
           <a:lstStyle/>
           <a:p>
             <a:pPr algn="ctr">
@@ -6585,7 +6728,7 @@
           </a:fontRef>
         </p:style>
         <p:txBody>
-          <a:bodyPr rtlCol="0" anchor="ctr" wrap="square" lIns="50800" rIns="50800" tIns="25400" bIns="25400"/>
+          <a:bodyPr wrap="square" lIns="50800" tIns="25400" rIns="50800" bIns="25400" rtlCol="0" anchor="ctr"/>
           <a:lstStyle/>
           <a:p>
             <a:pPr algn="ctr">
@@ -6670,7 +6813,6 @@
               <a:srgbClr val="4A5A6A"/>
             </a:solidFill>
             <a:tailEnd type="triangle" w="med" len="med"/>
-            <a:prstDash val="dash"/>
           </a:ln>
         </p:spPr>
         <p:style>
@@ -6707,7 +6849,6 @@
               <a:srgbClr val="4A5A6A"/>
             </a:solidFill>
             <a:tailEnd type="triangle" w="med" len="med"/>
-            <a:prstDash val="dash"/>
           </a:ln>
         </p:spPr>
         <p:style>
@@ -6744,7 +6885,6 @@
               <a:srgbClr val="4A5A6A"/>
             </a:solidFill>
             <a:tailEnd type="triangle" w="med" len="med"/>
-            <a:prstDash val="dash"/>
           </a:ln>
         </p:spPr>
         <p:style>
@@ -6771,7 +6911,7 @@
 </file>
 
 <file path=ppt/slides/slide4.xml><?xml version="1.0" encoding="utf-8"?>
-<p:sld xmlns:a="http://schemas.openxmlformats.org/drawingml/2006/main" xmlns:p="http://schemas.openxmlformats.org/presentationml/2006/main" xmlns:r="http://schemas.openxmlformats.org/officeDocument/2006/relationships">
+<p:sld xmlns:a="http://schemas.openxmlformats.org/drawingml/2006/main" xmlns:r="http://schemas.openxmlformats.org/officeDocument/2006/relationships" xmlns:p="http://schemas.openxmlformats.org/presentationml/2006/main">
   <p:cSld>
     <p:spTree>
       <p:nvGrpSpPr>
@@ -6779,7 +6919,14 @@
         <p:cNvGrpSpPr/>
         <p:nvPr/>
       </p:nvGrpSpPr>
-      <p:grpSpPr/>
+      <p:grpSpPr>
+        <a:xfrm>
+          <a:off x="0" y="0"/>
+          <a:ext cx="0" cy="0"/>
+          <a:chOff x="0" y="0"/>
+          <a:chExt cx="0" cy="0"/>
+        </a:xfrm>
+      </p:grpSpPr>
       <p:sp>
         <p:nvSpPr>
           <p:cNvPr id="2" name="Rectangle 1"/>
@@ -6821,6 +6968,7 @@
           <a:lstStyle/>
           <a:p>
             <a:pPr algn="ctr"/>
+            <a:endParaRPr/>
           </a:p>
         </p:txBody>
       </p:sp>
@@ -6901,6 +7049,7 @@
           <a:lstStyle/>
           <a:p>
             <a:pPr algn="ctr"/>
+            <a:endParaRPr/>
           </a:p>
         </p:txBody>
       </p:sp>
@@ -7080,7 +7229,7 @@
 </file>
 
 <file path=ppt/slides/slide5.xml><?xml version="1.0" encoding="utf-8"?>
-<p:sld xmlns:a="http://schemas.openxmlformats.org/drawingml/2006/main" xmlns:p="http://schemas.openxmlformats.org/presentationml/2006/main" xmlns:r="http://schemas.openxmlformats.org/officeDocument/2006/relationships">
+<p:sld xmlns:a="http://schemas.openxmlformats.org/drawingml/2006/main" xmlns:r="http://schemas.openxmlformats.org/officeDocument/2006/relationships" xmlns:p="http://schemas.openxmlformats.org/presentationml/2006/main">
   <p:cSld>
     <p:spTree>
       <p:nvGrpSpPr>
@@ -7088,7 +7237,14 @@
         <p:cNvGrpSpPr/>
         <p:nvPr/>
       </p:nvGrpSpPr>
-      <p:grpSpPr/>
+      <p:grpSpPr>
+        <a:xfrm>
+          <a:off x="0" y="0"/>
+          <a:ext cx="0" cy="0"/>
+          <a:chOff x="0" y="0"/>
+          <a:chExt cx="0" cy="0"/>
+        </a:xfrm>
+      </p:grpSpPr>
       <p:sp>
         <p:nvSpPr>
           <p:cNvPr id="2" name="Rectangle 1"/>
@@ -7130,6 +7286,7 @@
           <a:lstStyle/>
           <a:p>
             <a:pPr algn="ctr"/>
+            <a:endParaRPr/>
           </a:p>
         </p:txBody>
       </p:sp>
@@ -7210,6 +7367,7 @@
           <a:lstStyle/>
           <a:p>
             <a:pPr algn="ctr"/>
+            <a:endParaRPr/>
           </a:p>
         </p:txBody>
       </p:sp>
@@ -7357,7 +7515,7 @@
 </file>
 
 <file path=ppt/slides/slide6.xml><?xml version="1.0" encoding="utf-8"?>
-<p:sld xmlns:a="http://schemas.openxmlformats.org/drawingml/2006/main" xmlns:p="http://schemas.openxmlformats.org/presentationml/2006/main" xmlns:r="http://schemas.openxmlformats.org/officeDocument/2006/relationships">
+<p:sld xmlns:a="http://schemas.openxmlformats.org/drawingml/2006/main" xmlns:r="http://schemas.openxmlformats.org/officeDocument/2006/relationships" xmlns:p="http://schemas.openxmlformats.org/presentationml/2006/main">
   <p:cSld>
     <p:spTree>
       <p:nvGrpSpPr>
@@ -7365,7 +7523,14 @@
         <p:cNvGrpSpPr/>
         <p:nvPr/>
       </p:nvGrpSpPr>
-      <p:grpSpPr/>
+      <p:grpSpPr>
+        <a:xfrm>
+          <a:off x="0" y="0"/>
+          <a:ext cx="0" cy="0"/>
+          <a:chOff x="0" y="0"/>
+          <a:chExt cx="0" cy="0"/>
+        </a:xfrm>
+      </p:grpSpPr>
       <p:sp>
         <p:nvSpPr>
           <p:cNvPr id="2" name="Rectangle 1"/>
@@ -7407,6 +7572,7 @@
           <a:lstStyle/>
           <a:p>
             <a:pPr algn="ctr"/>
+            <a:endParaRPr/>
           </a:p>
         </p:txBody>
       </p:sp>
@@ -7487,6 +7653,7 @@
           <a:lstStyle/>
           <a:p>
             <a:pPr algn="ctr"/>
+            <a:endParaRPr/>
           </a:p>
         </p:txBody>
       </p:sp>
@@ -7509,8 +7676,20 @@
                 <a:tableStyleId>{5C22544A-7EE6-4342-B048-85BDC9FD1C3A}</a:tableStyleId>
               </a:tblPr>
               <a:tblGrid>
-                <a:gridCol w="2926080"/>
-                <a:gridCol w="7955279"/>
+                <a:gridCol w="2926080">
+                  <a:extLst>
+                    <a:ext uri="{9D8B030D-6E8A-4147-A177-3AD203B41FA5}">
+                      <a16:colId xmlns:a16="http://schemas.microsoft.com/office/drawing/2014/main" val="20000"/>
+                    </a:ext>
+                  </a:extLst>
+                </a:gridCol>
+                <a:gridCol w="7955279">
+                  <a:extLst>
+                    <a:ext uri="{9D8B030D-6E8A-4147-A177-3AD203B41FA5}">
+                      <a16:colId xmlns:a16="http://schemas.microsoft.com/office/drawing/2014/main" val="20001"/>
+                    </a:ext>
+                  </a:extLst>
+                </a:gridCol>
               </a:tblGrid>
               <a:tr h="611505">
                 <a:tc>
@@ -7519,7 +7698,7 @@
                     <a:lstStyle/>
                     <a:p>
                       <a:pPr>
-                        <a:defRPr b="1" sz="1500">
+                        <a:defRPr sz="1500" b="1">
                           <a:solidFill>
                             <a:srgbClr val="FFFFFF"/>
                           </a:solidFill>
@@ -7543,7 +7722,7 @@
                     <a:lstStyle/>
                     <a:p>
                       <a:pPr>
-                        <a:defRPr b="1" sz="1500">
+                        <a:defRPr sz="1500" b="1">
                           <a:solidFill>
                             <a:srgbClr val="FFFFFF"/>
                           </a:solidFill>
@@ -7561,11 +7740,16 @@
                     </a:solidFill>
                   </a:tcPr>
                 </a:tc>
+                <a:extLst>
+                  <a:ext uri="{0D108BD9-81ED-4DB2-BD59-A6C34878D82A}">
+                    <a16:rowId xmlns:a16="http://schemas.microsoft.com/office/drawing/2014/main" val="10000"/>
+                  </a:ext>
+                </a:extLst>
               </a:tr>
               <a:tr h="611505">
                 <a:tc>
                   <a:txBody>
-                    <a:bodyPr wrap="square"/>
+                    <a:bodyPr/>
                     <a:lstStyle/>
                     <a:p>
                       <a:pPr>
@@ -7589,7 +7773,7 @@
                 </a:tc>
                 <a:tc>
                   <a:txBody>
-                    <a:bodyPr wrap="square"/>
+                    <a:bodyPr/>
                     <a:lstStyle/>
                     <a:p>
                       <a:pPr>
@@ -7611,11 +7795,16 @@
                     </a:solidFill>
                   </a:tcPr>
                 </a:tc>
+                <a:extLst>
+                  <a:ext uri="{0D108BD9-81ED-4DB2-BD59-A6C34878D82A}">
+                    <a16:rowId xmlns:a16="http://schemas.microsoft.com/office/drawing/2014/main" val="10001"/>
+                  </a:ext>
+                </a:extLst>
               </a:tr>
               <a:tr h="611505">
                 <a:tc>
                   <a:txBody>
-                    <a:bodyPr wrap="square"/>
+                    <a:bodyPr/>
                     <a:lstStyle/>
                     <a:p>
                       <a:pPr>
@@ -7639,7 +7828,7 @@
                 </a:tc>
                 <a:tc>
                   <a:txBody>
-                    <a:bodyPr wrap="square"/>
+                    <a:bodyPr/>
                     <a:lstStyle/>
                     <a:p>
                       <a:pPr>
@@ -7661,11 +7850,16 @@
                     </a:solidFill>
                   </a:tcPr>
                 </a:tc>
+                <a:extLst>
+                  <a:ext uri="{0D108BD9-81ED-4DB2-BD59-A6C34878D82A}">
+                    <a16:rowId xmlns:a16="http://schemas.microsoft.com/office/drawing/2014/main" val="10002"/>
+                  </a:ext>
+                </a:extLst>
               </a:tr>
               <a:tr h="611505">
                 <a:tc>
                   <a:txBody>
-                    <a:bodyPr wrap="square"/>
+                    <a:bodyPr/>
                     <a:lstStyle/>
                     <a:p>
                       <a:pPr>
@@ -7689,7 +7883,7 @@
                 </a:tc>
                 <a:tc>
                   <a:txBody>
-                    <a:bodyPr wrap="square"/>
+                    <a:bodyPr/>
                     <a:lstStyle/>
                     <a:p>
                       <a:pPr>
@@ -7711,11 +7905,16 @@
                     </a:solidFill>
                   </a:tcPr>
                 </a:tc>
+                <a:extLst>
+                  <a:ext uri="{0D108BD9-81ED-4DB2-BD59-A6C34878D82A}">
+                    <a16:rowId xmlns:a16="http://schemas.microsoft.com/office/drawing/2014/main" val="10003"/>
+                  </a:ext>
+                </a:extLst>
               </a:tr>
               <a:tr h="611505">
                 <a:tc>
                   <a:txBody>
-                    <a:bodyPr wrap="square"/>
+                    <a:bodyPr/>
                     <a:lstStyle/>
                     <a:p>
                       <a:pPr>
@@ -7739,7 +7938,7 @@
                 </a:tc>
                 <a:tc>
                   <a:txBody>
-                    <a:bodyPr wrap="square"/>
+                    <a:bodyPr/>
                     <a:lstStyle/>
                     <a:p>
                       <a:pPr>
@@ -7761,11 +7960,16 @@
                     </a:solidFill>
                   </a:tcPr>
                 </a:tc>
+                <a:extLst>
+                  <a:ext uri="{0D108BD9-81ED-4DB2-BD59-A6C34878D82A}">
+                    <a16:rowId xmlns:a16="http://schemas.microsoft.com/office/drawing/2014/main" val="10004"/>
+                  </a:ext>
+                </a:extLst>
               </a:tr>
               <a:tr h="611505">
                 <a:tc>
                   <a:txBody>
-                    <a:bodyPr wrap="square"/>
+                    <a:bodyPr/>
                     <a:lstStyle/>
                     <a:p>
                       <a:pPr>
@@ -7789,7 +7993,7 @@
                 </a:tc>
                 <a:tc>
                   <a:txBody>
-                    <a:bodyPr wrap="square"/>
+                    <a:bodyPr/>
                     <a:lstStyle/>
                     <a:p>
                       <a:pPr>
@@ -7811,11 +8015,16 @@
                     </a:solidFill>
                   </a:tcPr>
                 </a:tc>
+                <a:extLst>
+                  <a:ext uri="{0D108BD9-81ED-4DB2-BD59-A6C34878D82A}">
+                    <a16:rowId xmlns:a16="http://schemas.microsoft.com/office/drawing/2014/main" val="10005"/>
+                  </a:ext>
+                </a:extLst>
               </a:tr>
               <a:tr h="611505">
                 <a:tc>
                   <a:txBody>
-                    <a:bodyPr wrap="square"/>
+                    <a:bodyPr/>
                     <a:lstStyle/>
                     <a:p>
                       <a:pPr>
@@ -7839,7 +8048,7 @@
                 </a:tc>
                 <a:tc>
                   <a:txBody>
-                    <a:bodyPr wrap="square"/>
+                    <a:bodyPr/>
                     <a:lstStyle/>
                     <a:p>
                       <a:pPr>
@@ -7861,11 +8070,16 @@
                     </a:solidFill>
                   </a:tcPr>
                 </a:tc>
+                <a:extLst>
+                  <a:ext uri="{0D108BD9-81ED-4DB2-BD59-A6C34878D82A}">
+                    <a16:rowId xmlns:a16="http://schemas.microsoft.com/office/drawing/2014/main" val="10006"/>
+                  </a:ext>
+                </a:extLst>
               </a:tr>
               <a:tr h="611505">
                 <a:tc>
                   <a:txBody>
-                    <a:bodyPr wrap="square"/>
+                    <a:bodyPr/>
                     <a:lstStyle/>
                     <a:p>
                       <a:pPr>
@@ -7889,7 +8103,7 @@
                 </a:tc>
                 <a:tc>
                   <a:txBody>
-                    <a:bodyPr wrap="square"/>
+                    <a:bodyPr/>
                     <a:lstStyle/>
                     <a:p>
                       <a:pPr>
@@ -7911,6 +8125,11 @@
                     </a:solidFill>
                   </a:tcPr>
                 </a:tc>
+                <a:extLst>
+                  <a:ext uri="{0D108BD9-81ED-4DB2-BD59-A6C34878D82A}">
+                    <a16:rowId xmlns:a16="http://schemas.microsoft.com/office/drawing/2014/main" val="10007"/>
+                  </a:ext>
+                </a:extLst>
               </a:tr>
             </a:tbl>
           </a:graphicData>
@@ -7925,7 +8144,7 @@
 </file>
 
 <file path=ppt/slides/slide7.xml><?xml version="1.0" encoding="utf-8"?>
-<p:sld xmlns:a="http://schemas.openxmlformats.org/drawingml/2006/main" xmlns:p="http://schemas.openxmlformats.org/presentationml/2006/main" xmlns:r="http://schemas.openxmlformats.org/officeDocument/2006/relationships">
+<p:sld xmlns:a="http://schemas.openxmlformats.org/drawingml/2006/main" xmlns:r="http://schemas.openxmlformats.org/officeDocument/2006/relationships" xmlns:p="http://schemas.openxmlformats.org/presentationml/2006/main">
   <p:cSld>
     <p:spTree>
       <p:nvGrpSpPr>
@@ -7933,7 +8152,14 @@
         <p:cNvGrpSpPr/>
         <p:nvPr/>
       </p:nvGrpSpPr>
-      <p:grpSpPr/>
+      <p:grpSpPr>
+        <a:xfrm>
+          <a:off x="0" y="0"/>
+          <a:ext cx="0" cy="0"/>
+          <a:chOff x="0" y="0"/>
+          <a:chExt cx="0" cy="0"/>
+        </a:xfrm>
+      </p:grpSpPr>
       <p:sp>
         <p:nvSpPr>
           <p:cNvPr id="2" name="Rectangle 1"/>
@@ -7975,6 +8201,7 @@
           <a:lstStyle/>
           <a:p>
             <a:pPr algn="ctr"/>
+            <a:endParaRPr/>
           </a:p>
         </p:txBody>
       </p:sp>
@@ -8055,6 +8282,7 @@
           <a:lstStyle/>
           <a:p>
             <a:pPr algn="ctr"/>
+            <a:endParaRPr/>
           </a:p>
         </p:txBody>
       </p:sp>
@@ -8186,7 +8414,7 @@
 </file>
 
 <file path=ppt/slides/slide8.xml><?xml version="1.0" encoding="utf-8"?>
-<p:sld xmlns:a="http://schemas.openxmlformats.org/drawingml/2006/main" xmlns:p="http://schemas.openxmlformats.org/presentationml/2006/main" xmlns:r="http://schemas.openxmlformats.org/officeDocument/2006/relationships">
+<p:sld xmlns:a="http://schemas.openxmlformats.org/drawingml/2006/main" xmlns:r="http://schemas.openxmlformats.org/officeDocument/2006/relationships" xmlns:p="http://schemas.openxmlformats.org/presentationml/2006/main">
   <p:cSld>
     <p:spTree>
       <p:nvGrpSpPr>
@@ -8194,7 +8422,14 @@
         <p:cNvGrpSpPr/>
         <p:nvPr/>
       </p:nvGrpSpPr>
-      <p:grpSpPr/>
+      <p:grpSpPr>
+        <a:xfrm>
+          <a:off x="0" y="0"/>
+          <a:ext cx="0" cy="0"/>
+          <a:chOff x="0" y="0"/>
+          <a:chExt cx="0" cy="0"/>
+        </a:xfrm>
+      </p:grpSpPr>
       <p:sp>
         <p:nvSpPr>
           <p:cNvPr id="2" name="Rectangle 1"/>
@@ -8236,6 +8471,7 @@
           <a:lstStyle/>
           <a:p>
             <a:pPr algn="ctr"/>
+            <a:endParaRPr/>
           </a:p>
         </p:txBody>
       </p:sp>
@@ -8316,6 +8552,7 @@
           <a:lstStyle/>
           <a:p>
             <a:pPr algn="ctr"/>
+            <a:endParaRPr/>
           </a:p>
         </p:txBody>
       </p:sp>
@@ -8463,7 +8700,7 @@
 </file>
 
 <file path=ppt/slides/slide9.xml><?xml version="1.0" encoding="utf-8"?>
-<p:sld xmlns:a="http://schemas.openxmlformats.org/drawingml/2006/main" xmlns:p="http://schemas.openxmlformats.org/presentationml/2006/main" xmlns:r="http://schemas.openxmlformats.org/officeDocument/2006/relationships">
+<p:sld xmlns:a="http://schemas.openxmlformats.org/drawingml/2006/main" xmlns:r="http://schemas.openxmlformats.org/officeDocument/2006/relationships" xmlns:p="http://schemas.openxmlformats.org/presentationml/2006/main">
   <p:cSld>
     <p:spTree>
       <p:nvGrpSpPr>
@@ -8471,7 +8708,14 @@
         <p:cNvGrpSpPr/>
         <p:nvPr/>
       </p:nvGrpSpPr>
-      <p:grpSpPr/>
+      <p:grpSpPr>
+        <a:xfrm>
+          <a:off x="0" y="0"/>
+          <a:ext cx="0" cy="0"/>
+          <a:chOff x="0" y="0"/>
+          <a:chExt cx="0" cy="0"/>
+        </a:xfrm>
+      </p:grpSpPr>
       <p:sp>
         <p:nvSpPr>
           <p:cNvPr id="2" name="Rectangle 1"/>
@@ -8513,6 +8757,7 @@
           <a:lstStyle/>
           <a:p>
             <a:pPr algn="ctr"/>
+            <a:endParaRPr/>
           </a:p>
         </p:txBody>
       </p:sp>
@@ -8593,6 +8838,7 @@
           <a:lstStyle/>
           <a:p>
             <a:pPr algn="ctr"/>
+            <a:endParaRPr/>
           </a:p>
         </p:txBody>
       </p:sp>
